--- a/Ensemble_Anomaly_Maps_Presentation.pptx
+++ b/Ensemble_Anomaly_Maps_Presentation.pptx
@@ -3891,7 +3891,7 @@
             </a:r>
             <a:br/>
             <a:r>
-              <a:t>November 29, 2025</a:t>
+              <a:t>November 30, 2025</a:t>
             </a:r>
           </a:p>
         </p:txBody>
@@ -4365,7 +4365,7 @@
               <a:defRPr sz="1800"/>
             </a:pPr>
             <a:r>
-              <a:t>• Commit: 7a90faa7ef6f</a:t>
+              <a:t>• Commit: 0c30c17f7a84</a:t>
             </a:r>
           </a:p>
           <a:p>
@@ -8181,18 +8181,18 @@
               <a:defRPr sz="1800"/>
             </a:pPr>
             <a:r>
-              <a:t>• Git commit: 7a90faa7ef6f</a:t>
-            </a:r>
-          </a:p>
-          <a:p>
-            <a:pPr>
-              <a:spcAft>
-                <a:spcPts val="1200"/>
-              </a:spcAft>
-              <a:defRPr sz="1800"/>
-            </a:pPr>
-            <a:r>
-              <a:t>• Generation date: 2025-11-29 15:01:14</a:t>
+              <a:t>• Git commit: 0c30c17f7a84</a:t>
+            </a:r>
+          </a:p>
+          <a:p>
+            <a:pPr>
+              <a:spcAft>
+                <a:spcPts val="1200"/>
+              </a:spcAft>
+              <a:defRPr sz="1800"/>
+            </a:pPr>
+            <a:r>
+              <a:t>• Generation date: 2025-11-30 08:55:55</a:t>
             </a:r>
           </a:p>
           <a:p>

--- a/Ensemble_Anomaly_Maps_Presentation.pptx
+++ b/Ensemble_Anomaly_Maps_Presentation.pptx
@@ -4365,7 +4365,7 @@
               <a:defRPr sz="1800"/>
             </a:pPr>
             <a:r>
-              <a:t>• Commit: 0c30c17f7a84</a:t>
+              <a:t>• Commit: 7137f94e341c</a:t>
             </a:r>
           </a:p>
           <a:p>
@@ -8181,18 +8181,18 @@
               <a:defRPr sz="1800"/>
             </a:pPr>
             <a:r>
-              <a:t>• Git commit: 0c30c17f7a84</a:t>
-            </a:r>
-          </a:p>
-          <a:p>
-            <a:pPr>
-              <a:spcAft>
-                <a:spcPts val="1200"/>
-              </a:spcAft>
-              <a:defRPr sz="1800"/>
-            </a:pPr>
-            <a:r>
-              <a:t>• Generation date: 2025-11-30 08:55:55</a:t>
+              <a:t>• Git commit: 7137f94e341c</a:t>
+            </a:r>
+          </a:p>
+          <a:p>
+            <a:pPr>
+              <a:spcAft>
+                <a:spcPts val="1200"/>
+              </a:spcAft>
+              <a:defRPr sz="1800"/>
+            </a:pPr>
+            <a:r>
+              <a:t>• Generation date: 2025-11-30 09:06:25</a:t>
             </a:r>
           </a:p>
           <a:p>
